--- a/flyers/ppr_20260330_walterscheirer.pptx
+++ b/flyers/ppr_20260330_walterscheirer.pptx
@@ -312,7 +312,7 @@
           <a:p>
             <a:fld id="{B7144548-CE31-441F-AEEE-1D451D9E0324}" type="datetimeFigureOut">
               <a:rPr lang="en-US" smtClean="0"/>
-              <a:t>3/12/2026</a:t>
+              <a:t>3/23/2026</a:t>
             </a:fld>
             <a:endParaRPr lang="en-US"/>
           </a:p>
@@ -482,7 +482,7 @@
           <a:p>
             <a:fld id="{B7144548-CE31-441F-AEEE-1D451D9E0324}" type="datetimeFigureOut">
               <a:rPr lang="en-US" smtClean="0"/>
-              <a:t>3/12/2026</a:t>
+              <a:t>3/23/2026</a:t>
             </a:fld>
             <a:endParaRPr lang="en-US"/>
           </a:p>
@@ -662,7 +662,7 @@
           <a:p>
             <a:fld id="{B7144548-CE31-441F-AEEE-1D451D9E0324}" type="datetimeFigureOut">
               <a:rPr lang="en-US" smtClean="0"/>
-              <a:t>3/12/2026</a:t>
+              <a:t>3/23/2026</a:t>
             </a:fld>
             <a:endParaRPr lang="en-US"/>
           </a:p>
@@ -831,7 +831,7 @@
           <a:p>
             <a:fld id="{B7144548-CE31-441F-AEEE-1D451D9E0324}" type="datetimeFigureOut">
               <a:rPr lang="en-US" smtClean="0"/>
-              <a:t>3/12/2026</a:t>
+              <a:t>3/23/2026</a:t>
             </a:fld>
             <a:endParaRPr lang="en-US"/>
           </a:p>
@@ -1075,7 +1075,7 @@
           <a:p>
             <a:fld id="{B7144548-CE31-441F-AEEE-1D451D9E0324}" type="datetimeFigureOut">
               <a:rPr lang="en-US" smtClean="0"/>
-              <a:t>3/12/2026</a:t>
+              <a:t>3/23/2026</a:t>
             </a:fld>
             <a:endParaRPr lang="en-US"/>
           </a:p>
@@ -1307,7 +1307,7 @@
           <a:p>
             <a:fld id="{B7144548-CE31-441F-AEEE-1D451D9E0324}" type="datetimeFigureOut">
               <a:rPr lang="en-US" smtClean="0"/>
-              <a:t>3/12/2026</a:t>
+              <a:t>3/23/2026</a:t>
             </a:fld>
             <a:endParaRPr lang="en-US"/>
           </a:p>
@@ -1674,7 +1674,7 @@
           <a:p>
             <a:fld id="{B7144548-CE31-441F-AEEE-1D451D9E0324}" type="datetimeFigureOut">
               <a:rPr lang="en-US" smtClean="0"/>
-              <a:t>3/12/2026</a:t>
+              <a:t>3/23/2026</a:t>
             </a:fld>
             <a:endParaRPr lang="en-US"/>
           </a:p>
@@ -1792,7 +1792,7 @@
           <a:p>
             <a:fld id="{B7144548-CE31-441F-AEEE-1D451D9E0324}" type="datetimeFigureOut">
               <a:rPr lang="en-US" smtClean="0"/>
-              <a:t>3/12/2026</a:t>
+              <a:t>3/23/2026</a:t>
             </a:fld>
             <a:endParaRPr lang="en-US"/>
           </a:p>
@@ -1887,7 +1887,7 @@
           <a:p>
             <a:fld id="{B7144548-CE31-441F-AEEE-1D451D9E0324}" type="datetimeFigureOut">
               <a:rPr lang="en-US" smtClean="0"/>
-              <a:t>3/12/2026</a:t>
+              <a:t>3/23/2026</a:t>
             </a:fld>
             <a:endParaRPr lang="en-US"/>
           </a:p>
@@ -2164,7 +2164,7 @@
           <a:p>
             <a:fld id="{B7144548-CE31-441F-AEEE-1D451D9E0324}" type="datetimeFigureOut">
               <a:rPr lang="en-US" smtClean="0"/>
-              <a:t>3/12/2026</a:t>
+              <a:t>3/23/2026</a:t>
             </a:fld>
             <a:endParaRPr lang="en-US"/>
           </a:p>
@@ -2421,7 +2421,7 @@
           <a:p>
             <a:fld id="{B7144548-CE31-441F-AEEE-1D451D9E0324}" type="datetimeFigureOut">
               <a:rPr lang="en-US" smtClean="0"/>
-              <a:t>3/12/2026</a:t>
+              <a:t>3/23/2026</a:t>
             </a:fld>
             <a:endParaRPr lang="en-US"/>
           </a:p>
@@ -2634,7 +2634,7 @@
           <a:p>
             <a:fld id="{B7144548-CE31-441F-AEEE-1D451D9E0324}" type="datetimeFigureOut">
               <a:rPr lang="en-US" smtClean="0"/>
-              <a:t>3/12/2026</a:t>
+              <a:t>3/23/2026</a:t>
             </a:fld>
             <a:endParaRPr lang="en-US"/>
           </a:p>
@@ -4683,7 +4683,7 @@
                       </a:schemeClr>
                     </a:solidFill>
                   </a:rPr>
-                  <a:t>March 30, 2026; 1130 – 1230; ITE 325-B </a:t>
+                  <a:t>March 30, 2026; 1130 – 1230; ITE 459 </a:t>
                 </a:r>
               </a:p>
               <a:p>
@@ -4711,7 +4711,7 @@
                       </a:extLst>
                     </a:hlinkClick>
                   </a:rPr>
-                  <a:t>https://meet.google.com/ura-ixit-yax</a:t>
+                  <a:t>https://meet.google.com/mcv-bdaq-aud</a:t>
                 </a:r>
                 <a:r>
                   <a:rPr lang="en-US" sz="1600" dirty="0">

--- a/flyers/ppr_20260330_walterscheirer.pptx
+++ b/flyers/ppr_20260330_walterscheirer.pptx
@@ -4593,19 +4593,18 @@
                       <a:schemeClr val="bg1"/>
                     </a:solidFill>
                   </a:rPr>
-                  <a:t>Distinguished Lecture</a:t>
+                  <a:t>CSEE Distinguished Speaker Series</a:t>
+                </a:r>
+                <a:r>
+                  <a:rPr lang="en-US" sz="2400" b="1" dirty="0">
+                    <a:solidFill>
+                      <a:schemeClr val="bg1"/>
+                    </a:solidFill>
+                  </a:rPr>
+                  <a:t> </a:t>
                 </a:r>
                 <a14:m>
                   <m:oMath xmlns:m="http://schemas.openxmlformats.org/officeDocument/2006/math">
-                    <m:r>
-                      <a:rPr lang="en-US" sz="3200" b="1" i="0" smtClean="0">
-                        <a:solidFill>
-                          <a:schemeClr val="bg1"/>
-                        </a:solidFill>
-                        <a:latin typeface="Cambria Math" panose="02040503050406030204" pitchFamily="18" charset="0"/>
-                      </a:rPr>
-                      <m:t> </m:t>
-                    </m:r>
                     <m:r>
                       <a:rPr lang="en-US" sz="3200" b="1" i="1" smtClean="0">
                         <a:solidFill>
